--- a/solution_presentation.pptx
+++ b/solution_presentation.pptx
@@ -3623,17 +3623,49 @@
           <a:p>
             <a:pPr>
               <a:spcAft>
+                <a:spcPts val="200"/>
+              </a:spcAft>
+            </a:pPr>
+            <a:r>
+              <a:rPr sz="3000" b="1" i="0">
+                <a:solidFill>
+                  <a:srgbClr val="00B4D8"/>
+                </a:solidFill>
+                <a:latin typeface="Cambria"/>
+              </a:rPr>
+              <a:t>1437.2 ms</a:t>
+            </a:r>
+          </a:p>
+          <a:p>
+            <a:pPr>
+              <a:spcAft>
                 <a:spcPts val="1000"/>
               </a:spcAft>
             </a:pPr>
             <a:r>
-              <a:rPr sz="2600" b="1" i="0">
+              <a:rPr sz="1100" b="0" i="0">
                 <a:solidFill>
                   <a:srgbClr val="5A6B7A"/>
                 </a:solidFill>
-                <a:latin typeface="Cambria"/>
-              </a:rPr>
-              <a:t>pending</a:t>
+                <a:latin typeface="Calibri"/>
+              </a:rPr>
+              <a:t>per image, model forward</a:t>
+            </a:r>
+          </a:p>
+          <a:p>
+            <a:pPr>
+              <a:spcAft>
+                <a:spcPts val="1000"/>
+              </a:spcAft>
+            </a:pPr>
+            <a:r>
+              <a:rPr sz="1300" b="1" i="0">
+                <a:solidFill>
+                  <a:srgbClr val="1A2733"/>
+                </a:solidFill>
+                <a:latin typeface="Calibri"/>
+              </a:rPr>
+              <a:t>1 images / second</a:t>
             </a:r>
           </a:p>
           <a:p>
@@ -3813,16 +3845,40 @@
           </a:p>
         </p:txBody>
       </p:sp>
-      <p:sp>
-        <p:nvSpPr>
-          <p:cNvPr id="4" name="Rounded Rectangle 3"/>
+      <p:pic>
+        <p:nvPicPr>
+          <p:cNvPr id="4" name="Picture 3" descr="qualitative.png"/>
+          <p:cNvPicPr>
+            <a:picLocks noChangeAspect="1"/>
+          </p:cNvPicPr>
+          <p:nvPr/>
+        </p:nvPicPr>
+        <p:blipFill>
+          <a:blip r:embed="rId2"/>
+          <a:stretch>
+            <a:fillRect/>
+          </a:stretch>
+        </p:blipFill>
+        <p:spPr>
+          <a:xfrm>
+            <a:off x="640080" y="1691640"/>
+            <a:ext cx="1371600" cy="3657600"/>
+          </a:xfrm>
+          <a:prstGeom prst="rect">
+            <a:avLst/>
+          </a:prstGeom>
+        </p:spPr>
+      </p:pic>
+      <p:sp>
+        <p:nvSpPr>
+          <p:cNvPr id="5" name="Rounded Rectangle 4"/>
           <p:cNvSpPr/>
           <p:nvPr/>
         </p:nvSpPr>
         <p:spPr>
           <a:xfrm>
-            <a:off x="640080" y="1737360"/>
-            <a:ext cx="10908792" cy="3566160"/>
+            <a:off x="5577840" y="1691640"/>
+            <a:ext cx="5973775" cy="3657600"/>
           </a:xfrm>
           <a:prstGeom prst="roundRect">
             <a:avLst>
@@ -3956,7 +4012,7 @@
       </p:sp>
       <p:sp>
         <p:nvSpPr>
-          <p:cNvPr id="5" name="TextBox 4"/>
+          <p:cNvPr id="6" name="TextBox 5"/>
           <p:cNvSpPr txBox="1"/>
           <p:nvPr/>
         </p:nvSpPr>
@@ -10651,7 +10707,7 @@
                 </a:solidFill>
                 <a:latin typeface="Calibri"/>
               </a:rPr>
-              <a:t>23.18</a:t>
+              <a:t>22.94</a:t>
             </a:r>
           </a:p>
         </p:txBody>
@@ -10690,7 +10746,7 @@
                 </a:solidFill>
                 <a:latin typeface="Calibri"/>
               </a:rPr>
-              <a:t>pending</a:t>
+              <a:t>0.5460</a:t>
             </a:r>
           </a:p>
         </p:txBody>
@@ -11005,7 +11061,7 @@
                 </a:solidFill>
                 <a:latin typeface="Calibri"/>
               </a:rPr>
-              <a:t>pending</a:t>
+              <a:t>17.66</a:t>
             </a:r>
           </a:p>
         </p:txBody>
@@ -11044,7 +11100,7 @@
                 </a:solidFill>
                 <a:latin typeface="Calibri"/>
               </a:rPr>
-              <a:t>pending</a:t>
+              <a:t>0.3311</a:t>
             </a:r>
           </a:p>
         </p:txBody>
@@ -11118,27 +11174,27 @@
             <a:r>
               <a:rPr sz="3000" b="1" i="0">
                 <a:solidFill>
+                  <a:srgbClr val="00B4D8"/>
+                </a:solidFill>
+                <a:latin typeface="Cambria"/>
+              </a:rPr>
+              <a:t>+-5.28 dB</a:t>
+            </a:r>
+          </a:p>
+          <a:p>
+            <a:pPr>
+              <a:spcAft>
+                <a:spcPts val="0"/>
+              </a:spcAft>
+            </a:pPr>
+            <a:r>
+              <a:rPr sz="1050" b="0" i="0">
+                <a:solidFill>
                   <a:srgbClr val="5A6B7A"/>
                 </a:solidFill>
-                <a:latin typeface="Cambria"/>
-              </a:rPr>
-              <a:t>pending</a:t>
-            </a:r>
-          </a:p>
-          <a:p>
-            <a:pPr>
-              <a:spcAft>
-                <a:spcPts val="0"/>
-              </a:spcAft>
-            </a:pPr>
-            <a:r>
-              <a:rPr sz="1050" b="0" i="0">
-                <a:solidFill>
-                  <a:srgbClr val="5A6B7A"/>
-                </a:solidFill>
-                <a:latin typeface="Calibri"/>
-              </a:rPr>
-              <a:t>final training run in progress</a:t>
+                <a:latin typeface="Calibri"/>
+              </a:rPr>
+              <a:t>over the bicubic baseline</a:t>
             </a:r>
           </a:p>
         </p:txBody>

--- a/solution_presentation.pptx
+++ b/solution_presentation.pptx
@@ -3633,7 +3633,7 @@
                 </a:solidFill>
                 <a:latin typeface="Cambria"/>
               </a:rPr>
-              <a:t>1437.2 ms</a:t>
+              <a:t>2015.2 ms</a:t>
             </a:r>
           </a:p>
           <a:p>
@@ -3665,7 +3665,7 @@
                 </a:solidFill>
                 <a:latin typeface="Calibri"/>
               </a:rPr>
-              <a:t>1 images / second</a:t>
+              <a:t>0 images / second</a:t>
             </a:r>
           </a:p>
           <a:p>
@@ -11061,7 +11061,7 @@
                 </a:solidFill>
                 <a:latin typeface="Calibri"/>
               </a:rPr>
-              <a:t>17.66</a:t>
+              <a:t>27.54</a:t>
             </a:r>
           </a:p>
         </p:txBody>
@@ -11100,7 +11100,7 @@
                 </a:solidFill>
                 <a:latin typeface="Calibri"/>
               </a:rPr>
-              <a:t>0.3311</a:t>
+              <a:t>0.7594</a:t>
             </a:r>
           </a:p>
         </p:txBody>
@@ -11178,7 +11178,7 @@
                 </a:solidFill>
                 <a:latin typeface="Cambria"/>
               </a:rPr>
-              <a:t>+-5.28 dB</a:t>
+              <a:t>+4.60 dB</a:t>
             </a:r>
           </a:p>
           <a:p>

--- a/solution_presentation.pptx
+++ b/solution_presentation.pptx
@@ -3633,7 +3633,7 @@
                 </a:solidFill>
                 <a:latin typeface="Cambria"/>
               </a:rPr>
-              <a:t>2015.2 ms</a:t>
+              <a:t>21.7 ms</a:t>
             </a:r>
           </a:p>
           <a:p>
@@ -3665,7 +3665,7 @@
                 </a:solidFill>
                 <a:latin typeface="Calibri"/>
               </a:rPr>
-              <a:t>0 images / second</a:t>
+              <a:t>46 images / second</a:t>
             </a:r>
           </a:p>
           <a:p>
@@ -10785,7 +10785,7 @@
                 </a:solidFill>
                 <a:latin typeface="Calibri"/>
               </a:rPr>
-              <a:t>pending</a:t>
+              <a:t>0.4478</a:t>
             </a:r>
           </a:p>
         </p:txBody>
@@ -11139,7 +11139,7 @@
                 </a:solidFill>
                 <a:latin typeface="Calibri"/>
               </a:rPr>
-              <a:t>pending</a:t>
+              <a:t>0.3922</a:t>
             </a:r>
           </a:p>
         </p:txBody>
